--- a/STARLAB_Slide_Decks_All/07_Research_Journals.pptx
+++ b/STARLAB_Slide_Decks_All/07_Research_Journals.pptx
@@ -2,30 +2,30 @@
 <file path=ppt/presentation.xml><?xml version="1.0" encoding="utf-8"?>
 <p:presentation xmlns:p="http://schemas.openxmlformats.org/presentationml/2006/main">
   <p:sldMasterIdLst>
-    <p:sldMasterId xmlns:r="http://schemas.openxmlformats.org/officeDocument/2006/relationships" id="2147483648" r:id="Refe15755c9a749cb"/>
+    <p:sldMasterId xmlns:r="http://schemas.openxmlformats.org/officeDocument/2006/relationships" id="2147483648" r:id="R4ad24ce9cbd644da"/>
   </p:sldMasterIdLst>
   <p:notesMasterIdLst>
-    <p:notesMasterId xmlns:r="http://schemas.openxmlformats.org/officeDocument/2006/relationships" r:id="Re770d1eaf9d64ff7"/>
+    <p:notesMasterId xmlns:r="http://schemas.openxmlformats.org/officeDocument/2006/relationships" r:id="R3176071c0ee543a3"/>
   </p:notesMasterIdLst>
   <p:sldIdLst>
-    <p:sldId xmlns:r="http://schemas.openxmlformats.org/officeDocument/2006/relationships" id="256" r:id="R2299051e2acf47de"/>
-    <p:sldId xmlns:r="http://schemas.openxmlformats.org/officeDocument/2006/relationships" id="257" r:id="R58027622ded9413d"/>
-    <p:sldId xmlns:r="http://schemas.openxmlformats.org/officeDocument/2006/relationships" id="258" r:id="R8dc44a6cb5524d11"/>
-    <p:sldId xmlns:r="http://schemas.openxmlformats.org/officeDocument/2006/relationships" id="259" r:id="R27eeb8b402314b18"/>
-    <p:sldId xmlns:r="http://schemas.openxmlformats.org/officeDocument/2006/relationships" id="260" r:id="Re5545c4484fa466e"/>
-    <p:sldId xmlns:r="http://schemas.openxmlformats.org/officeDocument/2006/relationships" id="261" r:id="Red6bc18c2ca24c01"/>
-    <p:sldId xmlns:r="http://schemas.openxmlformats.org/officeDocument/2006/relationships" id="262" r:id="R8c5cef36b6554281"/>
-    <p:sldId xmlns:r="http://schemas.openxmlformats.org/officeDocument/2006/relationships" id="263" r:id="R88724fd589b34e27"/>
-    <p:sldId xmlns:r="http://schemas.openxmlformats.org/officeDocument/2006/relationships" id="264" r:id="Reb192a6100d54988"/>
-    <p:sldId xmlns:r="http://schemas.openxmlformats.org/officeDocument/2006/relationships" id="265" r:id="Re2b9dd8dca6d4de1"/>
-    <p:sldId xmlns:r="http://schemas.openxmlformats.org/officeDocument/2006/relationships" id="266" r:id="R83cd36e224a94b62"/>
-    <p:sldId xmlns:r="http://schemas.openxmlformats.org/officeDocument/2006/relationships" id="267" r:id="R8ab31d88824a40db"/>
-    <p:sldId xmlns:r="http://schemas.openxmlformats.org/officeDocument/2006/relationships" id="268" r:id="R7040bd7400164205"/>
-    <p:sldId xmlns:r="http://schemas.openxmlformats.org/officeDocument/2006/relationships" id="269" r:id="R2c5b326ff445455c"/>
-    <p:sldId xmlns:r="http://schemas.openxmlformats.org/officeDocument/2006/relationships" id="270" r:id="R43317555312d405f"/>
-    <p:sldId xmlns:r="http://schemas.openxmlformats.org/officeDocument/2006/relationships" id="271" r:id="R57b3bc5e96ab466e"/>
-    <p:sldId xmlns:r="http://schemas.openxmlformats.org/officeDocument/2006/relationships" id="272" r:id="Rc1dfe20e6d5c451f"/>
-    <p:sldId xmlns:r="http://schemas.openxmlformats.org/officeDocument/2006/relationships" id="273" r:id="Rf286ef840f95483b"/>
+    <p:sldId xmlns:r="http://schemas.openxmlformats.org/officeDocument/2006/relationships" id="256" r:id="Rfd4fb61106344910"/>
+    <p:sldId xmlns:r="http://schemas.openxmlformats.org/officeDocument/2006/relationships" id="257" r:id="Rf89e0d3209b945c4"/>
+    <p:sldId xmlns:r="http://schemas.openxmlformats.org/officeDocument/2006/relationships" id="258" r:id="R341b57286ec44423"/>
+    <p:sldId xmlns:r="http://schemas.openxmlformats.org/officeDocument/2006/relationships" id="259" r:id="R5ba9104295eb4a37"/>
+    <p:sldId xmlns:r="http://schemas.openxmlformats.org/officeDocument/2006/relationships" id="260" r:id="R804c2c0e19344abe"/>
+    <p:sldId xmlns:r="http://schemas.openxmlformats.org/officeDocument/2006/relationships" id="261" r:id="R2564ab32ddd94a2c"/>
+    <p:sldId xmlns:r="http://schemas.openxmlformats.org/officeDocument/2006/relationships" id="262" r:id="R70748e015c09467e"/>
+    <p:sldId xmlns:r="http://schemas.openxmlformats.org/officeDocument/2006/relationships" id="263" r:id="R8d1d8a1c4dd747b2"/>
+    <p:sldId xmlns:r="http://schemas.openxmlformats.org/officeDocument/2006/relationships" id="264" r:id="R558cdc2dcf55485b"/>
+    <p:sldId xmlns:r="http://schemas.openxmlformats.org/officeDocument/2006/relationships" id="265" r:id="Raa0530fddb4643b8"/>
+    <p:sldId xmlns:r="http://schemas.openxmlformats.org/officeDocument/2006/relationships" id="266" r:id="R837fd8e9bb614dbe"/>
+    <p:sldId xmlns:r="http://schemas.openxmlformats.org/officeDocument/2006/relationships" id="267" r:id="Rfd76bb684c5e4c09"/>
+    <p:sldId xmlns:r="http://schemas.openxmlformats.org/officeDocument/2006/relationships" id="268" r:id="Rb926bdddf5014501"/>
+    <p:sldId xmlns:r="http://schemas.openxmlformats.org/officeDocument/2006/relationships" id="269" r:id="Rb8fdeae7929148d8"/>
+    <p:sldId xmlns:r="http://schemas.openxmlformats.org/officeDocument/2006/relationships" id="270" r:id="R11548fe76f5e4e10"/>
+    <p:sldId xmlns:r="http://schemas.openxmlformats.org/officeDocument/2006/relationships" id="271" r:id="R88546327b0c54d3d"/>
+    <p:sldId xmlns:r="http://schemas.openxmlformats.org/officeDocument/2006/relationships" id="272" r:id="Re7ca15098ccc42ec"/>
+    <p:sldId xmlns:r="http://schemas.openxmlformats.org/officeDocument/2006/relationships" id="273" r:id="R6d8f4006d1de49c7"/>
   </p:sldIdLst>
   <p:sldSz cx="12191675" cy="6858000"/>
   <p:notesSz cx="6858000" cy="9144000"/>
@@ -644,7 +644,7 @@
               <a:buNone/>
             </a:pPr>
             <a:r>
-              <a:t>REVISIT / SECONDARY USE</a:t>
+              <a:t>ONGOING ROUTINE REFERENCE</a:t>
             </a:r>
           </a:p>
           <a:p xmlns:a="http://schemas.openxmlformats.org/drawingml/2006/main">
@@ -662,7 +662,7 @@
               <a:buNone/>
             </a:pPr>
             <a:r>
-              <a:t>Use documentation routines throughout Unit 3 as needed</a:t>
+              <a:t>Research-journal routines may be consulted throughout Unit 3, but this is not a separately scheduled weekly deck assignment.</a:t>
             </a:r>
           </a:p>
           <a:p xmlns:a="http://schemas.openxmlformats.org/drawingml/2006/main">
@@ -698,7 +698,7 @@
               <a:buNone/>
             </a:pPr>
             <a:r>
-              <a:t>PAIRED DECK</a:t>
+              <a:t>PAIRED PRIMARY DECK</a:t>
             </a:r>
           </a:p>
           <a:p xmlns:a="http://schemas.openxmlformats.org/drawingml/2006/main">
@@ -770,7 +770,7 @@
               <a:buNone/>
             </a:pPr>
             <a:r>
-              <a:t>Shared weekly packet for Decks 6 and 7:</a:t>
+              <a:t>- Unit 3 Student Handouts 1-3</a:t>
             </a:r>
           </a:p>
           <a:p xmlns:a="http://schemas.openxmlformats.org/drawingml/2006/main">
@@ -788,7 +788,7 @@
               <a:buNone/>
             </a:pPr>
             <a:r>
-              <a:t>- Unit 3 Student Handouts 1-3</a:t>
+              <a:t>- Unit 3 Appendices A-C</a:t>
             </a:r>
           </a:p>
           <a:p xmlns:a="http://schemas.openxmlformats.org/drawingml/2006/main">
@@ -806,7 +806,7 @@
               <a:buNone/>
             </a:pPr>
             <a:r>
-              <a:t>- Unit 3 Appendices A-C</a:t>
+              <a:t/>
             </a:r>
           </a:p>
           <a:p xmlns:a="http://schemas.openxmlformats.org/drawingml/2006/main">
@@ -824,7 +824,7 @@
               <a:buNone/>
             </a:pPr>
             <a:r>
-              <a:t/>
+              <a:t>RESOURCE ALIGNMENT</a:t>
             </a:r>
           </a:p>
           <a:p xmlns:a="http://schemas.openxmlformats.org/drawingml/2006/main">
@@ -842,115 +842,7 @@
               <a:buNone/>
             </a:pPr>
             <a:r>
-              <a:t>LATER OPTIONAL / TEACHER REFERENCE</a:t>
-            </a:r>
-          </a:p>
-          <a:p xmlns:a="http://schemas.openxmlformats.org/drawingml/2006/main">
-            <a:pPr marL="457200" marR="0" indent="-228600" algn="l">
-              <a:lnSpc>
-                <a:spcPct val="100000"/>
-              </a:lnSpc>
-              <a:spcBef>
-                <a:spcPts val="0"/>
-              </a:spcBef>
-              <a:spcAft>
-                <a:spcPts val="0"/>
-              </a:spcAft>
-              <a:buSzPts val="1400"/>
-              <a:buNone/>
-            </a:pPr>
-            <a:r>
-              <a:t>- Unit 3 Student Handout 9: Weekly Progress Check-In</a:t>
-            </a:r>
-          </a:p>
-          <a:p xmlns:a="http://schemas.openxmlformats.org/drawingml/2006/main">
-            <a:pPr marL="457200" marR="0" indent="-228600" algn="l">
-              <a:lnSpc>
-                <a:spcPct val="100000"/>
-              </a:lnSpc>
-              <a:spcBef>
-                <a:spcPts val="0"/>
-              </a:spcBef>
-              <a:spcAft>
-                <a:spcPts val="0"/>
-              </a:spcAft>
-              <a:buSzPts val="1400"/>
-              <a:buNone/>
-            </a:pPr>
-            <a:r>
-              <a:t>- Unit 3 Student Handout 19: Research Journal Self-Assessment</a:t>
-            </a:r>
-          </a:p>
-          <a:p xmlns:a="http://schemas.openxmlformats.org/drawingml/2006/main">
-            <a:pPr marL="457200" marR="0" indent="-228600" algn="l">
-              <a:lnSpc>
-                <a:spcPct val="100000"/>
-              </a:lnSpc>
-              <a:spcBef>
-                <a:spcPts val="0"/>
-              </a:spcBef>
-              <a:spcAft>
-                <a:spcPts val="0"/>
-              </a:spcAft>
-              <a:buSzPts val="1400"/>
-              <a:buNone/>
-            </a:pPr>
-            <a:r>
-              <a:t>- Unit 3 Appendix Q: File and Data Organization Standards</a:t>
-            </a:r>
-          </a:p>
-          <a:p xmlns:a="http://schemas.openxmlformats.org/drawingml/2006/main">
-            <a:pPr marL="457200" marR="0" indent="-228600" algn="l">
-              <a:lnSpc>
-                <a:spcPct val="100000"/>
-              </a:lnSpc>
-              <a:spcBef>
-                <a:spcPts val="0"/>
-              </a:spcBef>
-              <a:spcAft>
-                <a:spcPts val="0"/>
-              </a:spcAft>
-              <a:buSzPts val="1400"/>
-              <a:buNone/>
-            </a:pPr>
-            <a:r>
-              <a:t/>
-            </a:r>
-          </a:p>
-          <a:p xmlns:a="http://schemas.openxmlformats.org/drawingml/2006/main">
-            <a:pPr marL="457200" marR="0" indent="-228600" algn="l">
-              <a:lnSpc>
-                <a:spcPct val="100000"/>
-              </a:lnSpc>
-              <a:spcBef>
-                <a:spcPts val="0"/>
-              </a:spcBef>
-              <a:spcAft>
-                <a:spcPts val="0"/>
-              </a:spcAft>
-              <a:buSzPts val="1400"/>
-              <a:buNone/>
-            </a:pPr>
-            <a:r>
-              <a:t>RESOURCE ALIGNMENT</a:t>
-            </a:r>
-          </a:p>
-          <a:p xmlns:a="http://schemas.openxmlformats.org/drawingml/2006/main">
-            <a:pPr marL="457200" marR="0" indent="-228600" algn="l">
-              <a:lnSpc>
-                <a:spcPct val="100000"/>
-              </a:lnSpc>
-              <a:spcBef>
-                <a:spcPts val="0"/>
-              </a:spcBef>
-              <a:spcAft>
-                <a:spcPts val="0"/>
-              </a:spcAft>
-              <a:buSzPts val="1400"/>
-              <a:buNone/>
-            </a:pPr>
-            <a:r>
-              <a:t>Introduce the journal system in Week 5. Revisit only the relevant documentation routine later; do not print later-week resources before their assigned week.</a:t>
+              <a:t>Introduce the journal system in Week 5. Later weeks should revisit only the relevant routine without printing future-week resources early.</a:t>
             </a:r>
           </a:p>
         </p:txBody>
@@ -3679,8 +3571,8 @@
   </p:cSld>
   <p:clrMap bg1="lt1" tx1="dk1" bg2="dk2" tx2="lt2" accent1="accent1" accent2="accent2" accent3="accent3" accent4="accent4" accent5="accent5" accent6="accent6" hlink="hlink" folHlink="folHlink"/>
   <p:sldLayoutIdLst>
-    <p:sldLayoutId xmlns:r="http://schemas.openxmlformats.org/officeDocument/2006/relationships" id="2147483649" r:id="R68b990b4326d46e4"/>
-    <p:sldLayoutId xmlns:r="http://schemas.openxmlformats.org/officeDocument/2006/relationships" id="2147483650" r:id="R5f1a973ef263486d"/>
+    <p:sldLayoutId xmlns:r="http://schemas.openxmlformats.org/officeDocument/2006/relationships" id="2147483649" r:id="R4c7c622128a8434f"/>
+    <p:sldLayoutId xmlns:r="http://schemas.openxmlformats.org/officeDocument/2006/relationships" id="2147483650" r:id="R5dda6b78ee6b4e51"/>
   </p:sldLayoutIdLst>
   <p:hf sldNum="0" hdr="0" ftr="0" dt="0"/>
   <p:txStyles>
@@ -4768,7 +4660,7 @@
           <p:nvPr/>
         </p:nvPicPr>
         <p:blipFill rotWithShape="1">
-          <a:blip xmlns:r="http://schemas.openxmlformats.org/officeDocument/2006/relationships" xmlns:a="http://schemas.openxmlformats.org/drawingml/2006/main" r:embed="R16eeed211a614671">
+          <a:blip xmlns:r="http://schemas.openxmlformats.org/officeDocument/2006/relationships" xmlns:a="http://schemas.openxmlformats.org/drawingml/2006/main" r:embed="Rc0ea17a4daaa46d4">
             <a:alphaModFix/>
           </a:blip>
           <a:srcRect xmlns:a="http://schemas.openxmlformats.org/drawingml/2006/main" l="0" t="0" r="0" b="0"/>
@@ -5363,7 +5255,7 @@
       </p:sp>
       <p:cxnSp>
         <p:nvCxnSpPr>
-          <p:cNvPr id="238" name="Google Shape;225;p13"/>
+          <p:cNvPr id="244" name="Google Shape;225;p13"/>
           <p:cNvCxnSpPr/>
           <p:nvPr/>
         </p:nvCxnSpPr>
@@ -6193,7 +6085,7 @@
       </p:sp>
       <p:cxnSp>
         <p:nvCxnSpPr>
-          <p:cNvPr id="261" name="Google Shape;243;p14"/>
+          <p:cNvPr id="267" name="Google Shape;243;p14"/>
           <p:cNvCxnSpPr/>
           <p:nvPr/>
         </p:nvCxnSpPr>
@@ -7341,7 +7233,7 @@
       </p:sp>
       <p:cxnSp>
         <p:nvCxnSpPr>
-          <p:cNvPr id="285" name="Google Shape;266;p15"/>
+          <p:cNvPr id="291" name="Google Shape;266;p15"/>
           <p:cNvCxnSpPr/>
           <p:nvPr/>
         </p:nvCxnSpPr>
@@ -8561,7 +8453,7 @@
       </p:sp>
       <p:cxnSp>
         <p:nvCxnSpPr>
-          <p:cNvPr id="307" name="Google Shape;290;p16"/>
+          <p:cNvPr id="313" name="Google Shape;290;p16"/>
           <p:cNvCxnSpPr/>
           <p:nvPr/>
         </p:nvCxnSpPr>
@@ -9644,7 +9536,7 @@
       </p:sp>
       <p:cxnSp>
         <p:nvCxnSpPr>
-          <p:cNvPr id="329" name="Google Shape;312;p17"/>
+          <p:cNvPr id="335" name="Google Shape;312;p17"/>
           <p:cNvCxnSpPr/>
           <p:nvPr/>
         </p:nvCxnSpPr>
@@ -10724,7 +10616,7 @@
       </p:sp>
       <p:cxnSp>
         <p:nvCxnSpPr>
-          <p:cNvPr id="353" name="Google Shape;334;p18"/>
+          <p:cNvPr id="359" name="Google Shape;334;p18"/>
           <p:cNvCxnSpPr/>
           <p:nvPr/>
         </p:nvCxnSpPr>
@@ -11933,7 +11825,7 @@
       </p:sp>
       <p:cxnSp>
         <p:nvCxnSpPr>
-          <p:cNvPr id="378" name="Google Shape;358;p19"/>
+          <p:cNvPr id="384" name="Google Shape;358;p19"/>
           <p:cNvCxnSpPr/>
           <p:nvPr/>
         </p:nvCxnSpPr>
@@ -13208,7 +13100,7 @@
       </p:sp>
       <p:cxnSp>
         <p:nvCxnSpPr>
-          <p:cNvPr id="402" name="Google Shape;383;p20"/>
+          <p:cNvPr id="408" name="Google Shape;383;p20"/>
           <p:cNvCxnSpPr/>
           <p:nvPr/>
         </p:nvCxnSpPr>
@@ -14420,7 +14312,7 @@
       </p:sp>
       <p:cxnSp>
         <p:nvCxnSpPr>
-          <p:cNvPr id="423" name="Google Shape;407;p21"/>
+          <p:cNvPr id="429" name="Google Shape;407;p21"/>
           <p:cNvCxnSpPr/>
           <p:nvPr/>
         </p:nvCxnSpPr>
@@ -15439,7 +15331,7 @@
       </p:sp>
       <p:cxnSp>
         <p:nvCxnSpPr>
-          <p:cNvPr id="48" name="Google Shape;33;p5"/>
+          <p:cNvPr id="54" name="Google Shape;33;p5"/>
           <p:cNvCxnSpPr/>
           <p:nvPr/>
         </p:nvCxnSpPr>
@@ -16394,7 +16286,7 @@
       </p:sp>
       <p:cxnSp>
         <p:nvCxnSpPr>
-          <p:cNvPr id="70" name="Google Shape;53;p6"/>
+          <p:cNvPr id="76" name="Google Shape;53;p6"/>
           <p:cNvCxnSpPr/>
           <p:nvPr/>
         </p:nvCxnSpPr>
@@ -17474,7 +17366,7 @@
       </p:sp>
       <p:cxnSp>
         <p:nvCxnSpPr>
-          <p:cNvPr id="102" name="Google Shape;75;p7"/>
+          <p:cNvPr id="108" name="Google Shape;75;p7"/>
           <p:cNvCxnSpPr/>
           <p:nvPr/>
         </p:nvCxnSpPr>
@@ -19200,7 +19092,7 @@
       </p:sp>
       <p:cxnSp>
         <p:nvCxnSpPr>
-          <p:cNvPr id="130" name="Google Shape;107;p8"/>
+          <p:cNvPr id="136" name="Google Shape;107;p8"/>
           <p:cNvCxnSpPr/>
           <p:nvPr/>
         </p:nvCxnSpPr>
@@ -20667,7 +20559,7 @@
       </p:sp>
       <p:cxnSp>
         <p:nvCxnSpPr>
-          <p:cNvPr id="150" name="Google Shape;135;p9"/>
+          <p:cNvPr id="156" name="Google Shape;135;p9"/>
           <p:cNvCxnSpPr/>
           <p:nvPr/>
         </p:nvCxnSpPr>
@@ -21625,7 +21517,7 @@
       </p:sp>
       <p:cxnSp>
         <p:nvCxnSpPr>
-          <p:cNvPr id="174" name="Google Shape;155;p10"/>
+          <p:cNvPr id="192" name="Google Shape;155;p10"/>
           <p:cNvCxnSpPr/>
           <p:nvPr/>
         </p:nvCxnSpPr>
@@ -22299,7 +22191,7 @@
       </p:sp>
       <p:cxnSp>
         <p:nvCxnSpPr>
-          <p:cNvPr id="185" name="Google Shape;166;p10"/>
+          <p:cNvPr id="203" name="Google Shape;166;p10"/>
           <p:cNvCxnSpPr/>
           <p:nvPr/>
         </p:nvCxnSpPr>
@@ -22324,7 +22216,7 @@
       </p:cxnSp>
       <p:cxnSp>
         <p:nvCxnSpPr>
-          <p:cNvPr id="186" name="Google Shape;167;p10"/>
+          <p:cNvPr id="204" name="Google Shape;167;p10"/>
           <p:cNvCxnSpPr/>
           <p:nvPr/>
         </p:nvCxnSpPr>
@@ -22764,7 +22656,7 @@
       </p:sp>
       <p:cxnSp>
         <p:nvCxnSpPr>
-          <p:cNvPr id="196" name="Google Shape;179;p11"/>
+          <p:cNvPr id="202" name="Google Shape;179;p11"/>
           <p:cNvCxnSpPr/>
           <p:nvPr/>
         </p:nvCxnSpPr>
@@ -23847,7 +23739,7 @@
       </p:sp>
       <p:cxnSp>
         <p:nvCxnSpPr>
-          <p:cNvPr id="220" name="Google Shape;201;p12"/>
+          <p:cNvPr id="226" name="Google Shape;201;p12"/>
           <p:cNvCxnSpPr/>
           <p:nvPr/>
         </p:nvCxnSpPr>
